--- a/demo/ppt/CareSlot_DevOps_Presentation.pptx
+++ b/demo/ppt/CareSlot_DevOps_Presentation.pptx
@@ -3311,6 +3311,66 @@
       <p:sp>
         <p:nvSpPr>
           <p:cNvPr id="6" name="Text 3"/>
+          <p:cNvSpPr txBox="1"/>
+          <p:nvPr/>
+        </p:nvSpPr>
+        <p:spPr>
+          <a:xfrm>
+            <a:off x="548640" y="5760720"/>
+            <a:ext cx="11064240" cy="320040"/>
+          </a:xfrm>
+          <a:prstGeom prst="rect">
+            <a:avLst/>
+          </a:prstGeom>
+          <a:noFill/>
+          <a:ln/>
+        </p:spPr>
+        <p:txBody>
+          <a:bodyPr wrap="square" lIns="0" tIns="0" rIns="0" bIns="0" rtlCol="0" anchor="ctr"/>
+          <a:lstStyle/>
+          <a:p>
+            <a:pPr indent="0" marL="0">
+              <a:buNone/>
+            </a:pPr>
+            <a:r>
+              <a:rPr lang="en-US" sz="1300" b="1" dirty="0">
+                <a:solidFill>
+                  <a:srgbClr val="FFFFFF"/>
+                </a:solidFill>
+                <a:latin typeface="Calibri" pitchFamily="34" charset="0"/>
+                <a:ea typeface="Calibri" pitchFamily="34" charset="-122"/>
+                <a:cs typeface="Calibri" pitchFamily="34" charset="-120"/>
+              </a:rPr>
+              <a:t>Slides: </a:t>
+            </a:r>
+            <a:pPr indent="0" marL="0">
+              <a:buNone/>
+            </a:pPr>
+            <a:r>
+              <a:rPr lang="en-US" sz="1300" u="sng" dirty="0">
+                <a:solidFill>
+                  <a:srgbClr val="5EEAD4"/>
+                </a:solidFill>
+                <a:latin typeface="Calibri" pitchFamily="34" charset="0"/>
+                <a:ea typeface="Calibri" pitchFamily="34" charset="-122"/>
+                <a:cs typeface="Calibri" pitchFamily="34" charset="-120"/>
+                <a:hlinkClick r:id="rId2" invalidUrl="" action="" tgtFrame="" tooltip="" history="1" highlightClick="0" endSnd="0">
+                  <a:extLst>
+                    <a:ext uri="{A12FA001-AC4F-418D-AE19-62706E023703}">
+                      <ahyp:hlinkClr xmlns:ahyp="http://schemas.microsoft.com/office/drawing/2018/hyperlinkcolor" val="tx"/>
+                    </a:ext>
+                  </a:extLst>
+                </a:hlinkClick>
+              </a:rPr>
+              <a:t>docs.google.com/presentation/d/1gozq9zRrB_hWzUNHuiw40d-w5joAO3xT</a:t>
+            </a:r>
+            <a:endParaRPr lang="en-US" sz="1300" dirty="0"/>
+          </a:p>
+        </p:txBody>
+      </p:sp>
+      <p:sp>
+        <p:nvSpPr>
+          <p:cNvPr id="7" name="Text 4"/>
           <p:cNvSpPr txBox="1"/>
           <p:nvPr/>
         </p:nvSpPr>
